--- a/dist/초3/수학/자연수계산/초3_수학_자연수계산_09_세자리수÷한자리수_학생용.pptx
+++ b/dist/초3/수학/자연수계산/초3_수학_자연수계산_09_세자리수÷한자리수_학생용.pptx
@@ -119,13 +119,13 @@
   <p:extLst>
     <p:ext uri="{521415D9-36F7-43E2-AB2F-B90AF26B5E84}">
       <p14:sectionLst xmlns:p14="http://schemas.microsoft.com/office/powerpoint/2010/main">
-        <p14:section name="도입" id="{49b540bf-82ad-c455-5277-1a586847e38a}">
+        <p14:section name="도입" id="{da6a05f4-9bd3-ae3a-6e5b-e177167bf563}">
           <p14:sldIdLst>
             <p14:sldId id="256"/>
             <p14:sldId id="257"/>
           </p14:sldIdLst>
         </p14:section>
-        <p14:section name="개념" id="{00f41cfa-a075-2b60-fee9-3b91565dbf75}">
+        <p14:section name="개념" id="{edf57c3f-d2a7-4870-d6d2-60534fbf1aa6}">
           <p14:sldIdLst>
             <p14:sldId id="258"/>
             <p14:sldId id="259"/>
@@ -133,31 +133,31 @@
             <p14:sldId id="262"/>
           </p14:sldIdLst>
         </p14:section>
-        <p14:section name="연습" id="{922e9a19-be38-ef5c-0ac7-24b2656977da}">
+        <p14:section name="연습" id="{f730e87e-cc43-98d4-2bd5-09c088bb7811}">
           <p14:sldIdLst>
             <p14:sldId id="260"/>
             <p14:sldId id="263"/>
             <p14:sldId id="264"/>
           </p14:sldIdLst>
         </p14:section>
-        <p14:section name="개념" id="{9a818182-c876-f4b0-e908-ea27bbd19a34}">
+        <p14:section name="개념" id="{c64f40f3-2583-78ee-e07a-b51ddc6fcae9}">
           <p14:sldIdLst/>
         </p14:section>
-        <p14:section name="연습" id="{c17e9e6c-d90d-59ff-0c9f-912203a5bd53}">
+        <p14:section name="연습" id="{84a8aebc-0b2c-0a51-535c-961ead2e899f}">
           <p14:sldIdLst/>
         </p14:section>
-        <p14:section name="확인" id="{2050e7c3-f528-93bc-d251-33a10fa88db7}">
+        <p14:section name="확인" id="{fa31493f-3582-a4a3-1d38-4ae1b96f43c8}">
           <p14:sldIdLst>
             <p14:sldId id="265"/>
             <p14:sldId id="266"/>
           </p14:sldIdLst>
         </p14:section>
-        <p14:section name="정리" id="{f1cf090c-1e6f-89a6-edf6-9164cc6ec739}">
+        <p14:section name="정리" id="{7f2dca78-dd01-b726-bd07-e6f30ddd08e3}">
           <p14:sldIdLst>
             <p14:sldId id="267"/>
           </p14:sldIdLst>
         </p14:section>
-        <p14:section name="보충" id="{a8e29632-2232-9cfd-6390-494ff8f5019f}">
+        <p14:section name="보충" id="{86a8269f-7ca5-70e6-6375-a567dccbdd3d}">
           <p14:sldIdLst>
             <p14:sldId id="268"/>
           </p14:sldIdLst>
@@ -2775,7 +2775,7 @@
           </p:nvPr>
         </p:nvGraphicFramePr>
         <p:xfrm>
-          <a:off x="8001000" y="1188720"/>
+          <a:off x="8001000" y="1217295"/>
           <a:ext cx="3291840" cy="914400"/>
         </p:xfrm>
         <a:graphic>
@@ -2788,7 +2788,7 @@
                 <a:gridCol w="822960"/>
                 <a:gridCol w="822960"/>
               </a:tblGrid>
-              <a:tr h="609600">
+              <a:tr h="590550">
                 <a:tc>
                   <a:txBody>
                     <a:bodyPr/>
@@ -3051,7 +3051,7 @@
                   </a:tcPr>
                 </a:tc>
               </a:tr>
-              <a:tr h="609600">
+              <a:tr h="590550">
                 <a:tc>
                   <a:txBody>
                     <a:bodyPr/>
@@ -3314,7 +3314,7 @@
                   </a:tcPr>
                 </a:tc>
               </a:tr>
-              <a:tr h="609600">
+              <a:tr h="590550">
                 <a:tc>
                   <a:txBody>
                     <a:bodyPr/>
@@ -5407,7 +5407,7 @@
           </p:nvPr>
         </p:nvGraphicFramePr>
         <p:xfrm>
-          <a:off x="8155168" y="1516380"/>
+          <a:off x="8155168" y="1569720"/>
           <a:ext cx="3108960" cy="914400"/>
         </p:xfrm>
         <a:graphic>
@@ -5419,7 +5419,7 @@
                 <a:gridCol w="1036320"/>
                 <a:gridCol w="1036320"/>
               </a:tblGrid>
-              <a:tr h="487680">
+              <a:tr h="472440">
                 <a:tc>
                   <a:txBody>
                     <a:bodyPr/>
@@ -5614,7 +5614,7 @@
                   </a:tcPr>
                 </a:tc>
               </a:tr>
-              <a:tr h="487680">
+              <a:tr h="472440">
                 <a:tc>
                   <a:txBody>
                     <a:bodyPr/>
@@ -5809,7 +5809,7 @@
                   </a:tcPr>
                 </a:tc>
               </a:tr>
-              <a:tr h="487680">
+              <a:tr h="472440">
                 <a:tc>
                   <a:txBody>
                     <a:bodyPr/>
@@ -6015,7 +6015,7 @@
                   </a:tcPr>
                 </a:tc>
               </a:tr>
-              <a:tr h="487680">
+              <a:tr h="472440">
                 <a:tc>
                   <a:txBody>
                     <a:bodyPr/>
@@ -6199,7 +6199,7 @@
                   </a:tcPr>
                 </a:tc>
               </a:tr>
-              <a:tr h="487680">
+              <a:tr h="472440">
                 <a:tc>
                   <a:txBody>
                     <a:bodyPr/>
@@ -6394,7 +6394,7 @@
                   </a:tcPr>
                 </a:tc>
               </a:tr>
-              <a:tr h="487680">
+              <a:tr h="472440">
                 <a:tc>
                   <a:txBody>
                     <a:bodyPr/>
@@ -6589,7 +6589,7 @@
                   </a:tcPr>
                 </a:tc>
               </a:tr>
-              <a:tr h="487680">
+              <a:tr h="472440">
                 <a:tc>
                   <a:txBody>
                     <a:bodyPr/>
@@ -9425,7 +9425,7 @@
           </p:nvPr>
         </p:nvGraphicFramePr>
         <p:xfrm>
-          <a:off x="7574890" y="1394460"/>
+          <a:off x="7574890" y="1468755"/>
           <a:ext cx="3840480" cy="914400"/>
         </p:xfrm>
         <a:graphic>
@@ -9438,7 +9438,7 @@
                 <a:gridCol w="960120"/>
                 <a:gridCol w="960120"/>
               </a:tblGrid>
-              <a:tr h="528320">
+              <a:tr h="511810">
                 <a:tc>
                   <a:txBody>
                     <a:bodyPr/>
@@ -9701,7 +9701,7 @@
                   </a:tcPr>
                 </a:tc>
               </a:tr>
-              <a:tr h="528320">
+              <a:tr h="511810">
                 <a:tc>
                   <a:txBody>
                     <a:bodyPr/>
@@ -9964,7 +9964,7 @@
                   </a:tcPr>
                 </a:tc>
               </a:tr>
-              <a:tr h="528320">
+              <a:tr h="511810">
                 <a:tc>
                   <a:txBody>
                     <a:bodyPr/>
@@ -10238,7 +10238,7 @@
                   </a:tcPr>
                 </a:tc>
               </a:tr>
-              <a:tr h="528320">
+              <a:tr h="511810">
                 <a:tc>
                   <a:txBody>
                     <a:bodyPr/>
@@ -10479,7 +10479,7 @@
                   </a:tcPr>
                 </a:tc>
               </a:tr>
-              <a:tr h="528320">
+              <a:tr h="511810">
                 <a:tc>
                   <a:txBody>
                     <a:bodyPr/>
@@ -10731,7 +10731,7 @@
                   </a:tcPr>
                 </a:tc>
               </a:tr>
-              <a:tr h="528320">
+              <a:tr h="511810">
                 <a:tc>
                   <a:txBody>
                     <a:bodyPr/>
@@ -10983,7 +10983,7 @@
                   </a:tcPr>
                 </a:tc>
               </a:tr>
-              <a:tr h="528320">
+              <a:tr h="511810">
                 <a:tc>
                   <a:txBody>
                     <a:bodyPr/>
@@ -11235,7 +11235,7 @@
                   </a:tcPr>
                 </a:tc>
               </a:tr>
-              <a:tr h="528320">
+              <a:tr h="511810">
                 <a:tc>
                   <a:txBody>
                     <a:bodyPr/>
@@ -11487,7 +11487,7 @@
                   </a:tcPr>
                 </a:tc>
               </a:tr>
-              <a:tr h="528320">
+              <a:tr h="511810">
                 <a:tc>
                   <a:txBody>
                     <a:bodyPr/>
@@ -12864,7 +12864,7 @@
           </p:nvPr>
         </p:nvGraphicFramePr>
         <p:xfrm>
-          <a:off x="7574890" y="1516380"/>
+          <a:off x="7574890" y="1569720"/>
           <a:ext cx="3840480" cy="914400"/>
         </p:xfrm>
         <a:graphic>
@@ -12877,7 +12877,7 @@
                 <a:gridCol w="960120"/>
                 <a:gridCol w="960120"/>
               </a:tblGrid>
-              <a:tr h="487680">
+              <a:tr h="472440">
                 <a:tc>
                   <a:txBody>
                     <a:bodyPr/>
@@ -13140,7 +13140,7 @@
                   </a:tcPr>
                 </a:tc>
               </a:tr>
-              <a:tr h="487680">
+              <a:tr h="472440">
                 <a:tc>
                   <a:txBody>
                     <a:bodyPr/>
@@ -13392,7 +13392,7 @@
                   </a:tcPr>
                 </a:tc>
               </a:tr>
-              <a:tr h="487680">
+              <a:tr h="472440">
                 <a:tc>
                   <a:txBody>
                     <a:bodyPr/>
@@ -13666,7 +13666,7 @@
                   </a:tcPr>
                 </a:tc>
               </a:tr>
-              <a:tr h="487680">
+              <a:tr h="472440">
                 <a:tc>
                   <a:txBody>
                     <a:bodyPr/>
@@ -13918,7 +13918,7 @@
                   </a:tcPr>
                 </a:tc>
               </a:tr>
-              <a:tr h="487680">
+              <a:tr h="472440">
                 <a:tc>
                   <a:txBody>
                     <a:bodyPr/>
@@ -14170,7 +14170,7 @@
                   </a:tcPr>
                 </a:tc>
               </a:tr>
-              <a:tr h="487680">
+              <a:tr h="472440">
                 <a:tc>
                   <a:txBody>
                     <a:bodyPr/>
@@ -14422,7 +14422,7 @@
                   </a:tcPr>
                 </a:tc>
               </a:tr>
-              <a:tr h="487680">
+              <a:tr h="472440">
                 <a:tc>
                   <a:txBody>
                     <a:bodyPr/>
@@ -15274,7 +15274,7 @@
           </p:nvPr>
         </p:nvGraphicFramePr>
         <p:xfrm>
-          <a:off x="1293876" y="2509520"/>
+          <a:off x="1293876" y="2542540"/>
           <a:ext cx="9601200" cy="914400"/>
         </p:xfrm>
         <a:graphic>
@@ -15286,7 +15286,7 @@
                 <a:gridCol w="4128516"/>
                 <a:gridCol w="2880360"/>
               </a:tblGrid>
-              <a:tr h="528320">
+              <a:tr h="511810">
                 <a:tc>
                   <a:txBody>
                     <a:bodyPr/>
@@ -15492,7 +15492,7 @@
                   </a:tcPr>
                 </a:tc>
               </a:tr>
-              <a:tr h="528320">
+              <a:tr h="511810">
                 <a:tc>
                   <a:txBody>
                     <a:bodyPr/>
@@ -15698,7 +15698,7 @@
                   </a:tcPr>
                 </a:tc>
               </a:tr>
-              <a:tr h="528320">
+              <a:tr h="511810">
                 <a:tc>
                   <a:txBody>
                     <a:bodyPr/>
@@ -15904,7 +15904,7 @@
                   </a:tcPr>
                 </a:tc>
               </a:tr>
-              <a:tr h="528320">
+              <a:tr h="511810">
                 <a:tc>
                   <a:txBody>
                     <a:bodyPr/>

--- a/dist/초3/수학/자연수계산/초3_수학_자연수계산_09_세자리수÷한자리수_학생용.pptx
+++ b/dist/초3/수학/자연수계산/초3_수학_자연수계산_09_세자리수÷한자리수_학생용.pptx
@@ -119,13 +119,13 @@
   <p:extLst>
     <p:ext uri="{521415D9-36F7-43E2-AB2F-B90AF26B5E84}">
       <p14:sectionLst xmlns:p14="http://schemas.microsoft.com/office/powerpoint/2010/main">
-        <p14:section name="도입" id="{da6a05f4-9bd3-ae3a-6e5b-e177167bf563}">
+        <p14:section name="도입" id="{70b9acec-f52a-28ff-107b-46ac236c0e16}">
           <p14:sldIdLst>
             <p14:sldId id="256"/>
             <p14:sldId id="257"/>
           </p14:sldIdLst>
         </p14:section>
-        <p14:section name="개념" id="{edf57c3f-d2a7-4870-d6d2-60534fbf1aa6}">
+        <p14:section name="개념" id="{98ab3e9d-0c91-3286-e563-810f5669a946}">
           <p14:sldIdLst>
             <p14:sldId id="258"/>
             <p14:sldId id="259"/>
@@ -133,31 +133,31 @@
             <p14:sldId id="262"/>
           </p14:sldIdLst>
         </p14:section>
-        <p14:section name="연습" id="{f730e87e-cc43-98d4-2bd5-09c088bb7811}">
+        <p14:section name="연습" id="{7af0e7f9-b9a3-367f-0a14-e064cb6e28a9}">
           <p14:sldIdLst>
             <p14:sldId id="260"/>
             <p14:sldId id="263"/>
             <p14:sldId id="264"/>
           </p14:sldIdLst>
         </p14:section>
-        <p14:section name="개념" id="{c64f40f3-2583-78ee-e07a-b51ddc6fcae9}">
+        <p14:section name="개념" id="{912aa3b3-b3bd-1baf-d932-25a57a31c33f}">
           <p14:sldIdLst/>
         </p14:section>
-        <p14:section name="연습" id="{84a8aebc-0b2c-0a51-535c-961ead2e899f}">
+        <p14:section name="연습" id="{f05a1a55-f8d3-ad8b-784a-cf39fb5ffb67}">
           <p14:sldIdLst/>
         </p14:section>
-        <p14:section name="확인" id="{fa31493f-3582-a4a3-1d38-4ae1b96f43c8}">
+        <p14:section name="확인" id="{f06f09df-8fa9-e9f4-abcd-6c5c7d982ab3}">
           <p14:sldIdLst>
             <p14:sldId id="265"/>
             <p14:sldId id="266"/>
           </p14:sldIdLst>
         </p14:section>
-        <p14:section name="정리" id="{7f2dca78-dd01-b726-bd07-e6f30ddd08e3}">
+        <p14:section name="정리" id="{126a022a-0df9-4c7c-ece0-f84dcfe71afc}">
           <p14:sldIdLst>
             <p14:sldId id="267"/>
           </p14:sldIdLst>
         </p14:section>
-        <p14:section name="보충" id="{86a8269f-7ca5-70e6-6375-a567dccbdd3d}">
+        <p14:section name="보충" id="{97234a11-289a-ea45-d7ef-2a67ee578881}">
           <p14:sldIdLst>
             <p14:sldId id="268"/>
           </p14:sldIdLst>
@@ -5203,7 +5203,7 @@
                 <a:ea typeface="맑은 고딕" pitchFamily="34" charset="-122"/>
                 <a:cs typeface="맑은 고딕" pitchFamily="34" charset="-120"/>
               </a:rPr>
-              <a:t>다음 시간: 분수의 뜻</a:t>
+              <a:t>다음 시간: 0이 있는 수의 뺄셈</a:t>
             </a:r>
             <a:endParaRPr lang="ko-KR" sz="2400" dirty="0"/>
           </a:p>
